--- a/SQL/Intro To SQL Day 1.pptx
+++ b/SQL/Intro To SQL Day 1.pptx
@@ -9,25 +9,27 @@
     <p:sldId id="263" r:id="rId3"/>
     <p:sldId id="268" r:id="rId4"/>
     <p:sldId id="269" r:id="rId5"/>
-    <p:sldId id="257" r:id="rId6"/>
-    <p:sldId id="258" r:id="rId7"/>
-    <p:sldId id="259" r:id="rId8"/>
-    <p:sldId id="260" r:id="rId9"/>
-    <p:sldId id="261" r:id="rId10"/>
-    <p:sldId id="262" r:id="rId11"/>
-    <p:sldId id="265" r:id="rId12"/>
-    <p:sldId id="264" r:id="rId13"/>
-    <p:sldId id="266" r:id="rId14"/>
-    <p:sldId id="267" r:id="rId15"/>
-    <p:sldId id="270" r:id="rId16"/>
-    <p:sldId id="274" r:id="rId17"/>
-    <p:sldId id="275" r:id="rId18"/>
-    <p:sldId id="276" r:id="rId19"/>
-    <p:sldId id="277" r:id="rId20"/>
-    <p:sldId id="271" r:id="rId21"/>
-    <p:sldId id="272" r:id="rId22"/>
-    <p:sldId id="273" r:id="rId23"/>
-    <p:sldId id="278" r:id="rId24"/>
+    <p:sldId id="279" r:id="rId6"/>
+    <p:sldId id="257" r:id="rId7"/>
+    <p:sldId id="258" r:id="rId8"/>
+    <p:sldId id="259" r:id="rId9"/>
+    <p:sldId id="260" r:id="rId10"/>
+    <p:sldId id="261" r:id="rId11"/>
+    <p:sldId id="262" r:id="rId12"/>
+    <p:sldId id="265" r:id="rId13"/>
+    <p:sldId id="264" r:id="rId14"/>
+    <p:sldId id="266" r:id="rId15"/>
+    <p:sldId id="267" r:id="rId16"/>
+    <p:sldId id="280" r:id="rId17"/>
+    <p:sldId id="270" r:id="rId18"/>
+    <p:sldId id="274" r:id="rId19"/>
+    <p:sldId id="275" r:id="rId20"/>
+    <p:sldId id="276" r:id="rId21"/>
+    <p:sldId id="277" r:id="rId22"/>
+    <p:sldId id="271" r:id="rId23"/>
+    <p:sldId id="272" r:id="rId24"/>
+    <p:sldId id="273" r:id="rId25"/>
+    <p:sldId id="278" r:id="rId26"/>
   </p:sldIdLst>
   <p:sldSz cx="12192000" cy="6858000"/>
   <p:notesSz cx="6858000" cy="9144000"/>
@@ -281,7 +283,7 @@
           <a:p>
             <a:fld id="{046598D6-C04D-9446-A58F-36E01C46C344}" type="datetimeFigureOut">
               <a:rPr lang="en-US" smtClean="0"/>
-              <a:t>1/3/25</a:t>
+              <a:t>6/19/26</a:t>
             </a:fld>
             <a:endParaRPr lang="en-US"/>
           </a:p>
@@ -479,7 +481,7 @@
           <a:p>
             <a:fld id="{046598D6-C04D-9446-A58F-36E01C46C344}" type="datetimeFigureOut">
               <a:rPr lang="en-US" smtClean="0"/>
-              <a:t>1/3/25</a:t>
+              <a:t>6/19/26</a:t>
             </a:fld>
             <a:endParaRPr lang="en-US"/>
           </a:p>
@@ -687,7 +689,7 @@
           <a:p>
             <a:fld id="{046598D6-C04D-9446-A58F-36E01C46C344}" type="datetimeFigureOut">
               <a:rPr lang="en-US" smtClean="0"/>
-              <a:t>1/3/25</a:t>
+              <a:t>6/19/26</a:t>
             </a:fld>
             <a:endParaRPr lang="en-US"/>
           </a:p>
@@ -885,7 +887,7 @@
           <a:p>
             <a:fld id="{046598D6-C04D-9446-A58F-36E01C46C344}" type="datetimeFigureOut">
               <a:rPr lang="en-US" smtClean="0"/>
-              <a:t>1/3/25</a:t>
+              <a:t>6/19/26</a:t>
             </a:fld>
             <a:endParaRPr lang="en-US"/>
           </a:p>
@@ -1160,7 +1162,7 @@
           <a:p>
             <a:fld id="{046598D6-C04D-9446-A58F-36E01C46C344}" type="datetimeFigureOut">
               <a:rPr lang="en-US" smtClean="0"/>
-              <a:t>1/3/25</a:t>
+              <a:t>6/19/26</a:t>
             </a:fld>
             <a:endParaRPr lang="en-US"/>
           </a:p>
@@ -1425,7 +1427,7 @@
           <a:p>
             <a:fld id="{046598D6-C04D-9446-A58F-36E01C46C344}" type="datetimeFigureOut">
               <a:rPr lang="en-US" smtClean="0"/>
-              <a:t>1/3/25</a:t>
+              <a:t>6/19/26</a:t>
             </a:fld>
             <a:endParaRPr lang="en-US"/>
           </a:p>
@@ -1837,7 +1839,7 @@
           <a:p>
             <a:fld id="{046598D6-C04D-9446-A58F-36E01C46C344}" type="datetimeFigureOut">
               <a:rPr lang="en-US" smtClean="0"/>
-              <a:t>1/3/25</a:t>
+              <a:t>6/19/26</a:t>
             </a:fld>
             <a:endParaRPr lang="en-US"/>
           </a:p>
@@ -1978,7 +1980,7 @@
           <a:p>
             <a:fld id="{046598D6-C04D-9446-A58F-36E01C46C344}" type="datetimeFigureOut">
               <a:rPr lang="en-US" smtClean="0"/>
-              <a:t>1/3/25</a:t>
+              <a:t>6/19/26</a:t>
             </a:fld>
             <a:endParaRPr lang="en-US"/>
           </a:p>
@@ -2091,7 +2093,7 @@
           <a:p>
             <a:fld id="{046598D6-C04D-9446-A58F-36E01C46C344}" type="datetimeFigureOut">
               <a:rPr lang="en-US" smtClean="0"/>
-              <a:t>1/3/25</a:t>
+              <a:t>6/19/26</a:t>
             </a:fld>
             <a:endParaRPr lang="en-US"/>
           </a:p>
@@ -2402,7 +2404,7 @@
           <a:p>
             <a:fld id="{046598D6-C04D-9446-A58F-36E01C46C344}" type="datetimeFigureOut">
               <a:rPr lang="en-US" smtClean="0"/>
-              <a:t>1/3/25</a:t>
+              <a:t>6/19/26</a:t>
             </a:fld>
             <a:endParaRPr lang="en-US"/>
           </a:p>
@@ -2690,7 +2692,7 @@
           <a:p>
             <a:fld id="{046598D6-C04D-9446-A58F-36E01C46C344}" type="datetimeFigureOut">
               <a:rPr lang="en-US" smtClean="0"/>
-              <a:t>1/3/25</a:t>
+              <a:t>6/19/26</a:t>
             </a:fld>
             <a:endParaRPr lang="en-US"/>
           </a:p>
@@ -2931,7 +2933,7 @@
           <a:p>
             <a:fld id="{046598D6-C04D-9446-A58F-36E01C46C344}" type="datetimeFigureOut">
               <a:rPr lang="en-US" smtClean="0"/>
-              <a:t>1/3/25</a:t>
+              <a:t>6/19/26</a:t>
             </a:fld>
             <a:endParaRPr lang="en-US"/>
           </a:p>
@@ -3454,6 +3456,220 @@
           <p:cNvPr id="2" name="Title 1">
             <a:extLst>
               <a:ext uri="{FF2B5EF4-FFF2-40B4-BE49-F238E27FC236}">
+                <a16:creationId xmlns:a16="http://schemas.microsoft.com/office/drawing/2014/main" id="{5A79FD0C-1C00-93F0-A57B-569DC7E4282C}"/>
+              </a:ext>
+            </a:extLst>
+          </p:cNvPr>
+          <p:cNvSpPr>
+            <a:spLocks noGrp="1"/>
+          </p:cNvSpPr>
+          <p:nvPr>
+            <p:ph type="title"/>
+          </p:nvPr>
+        </p:nvSpPr>
+        <p:spPr/>
+        <p:txBody>
+          <a:bodyPr/>
+          <a:lstStyle/>
+          <a:p>
+            <a:r>
+              <a:rPr lang="en-US" sz="4400" kern="100" dirty="0">
+                <a:effectLst/>
+                <a:latin typeface="Aptos" panose="020B0004020202020204" pitchFamily="34" charset="0"/>
+                <a:ea typeface="Aptos" panose="020B0004020202020204" pitchFamily="34" charset="0"/>
+                <a:cs typeface="Times New Roman" panose="02020603050405020304" pitchFamily="18" charset="0"/>
+              </a:rPr>
+              <a:t>Compound where clause (AND)</a:t>
+            </a:r>
+            <a:endParaRPr lang="en-US" dirty="0"/>
+          </a:p>
+        </p:txBody>
+      </p:sp>
+      <p:sp>
+        <p:nvSpPr>
+          <p:cNvPr id="3" name="Content Placeholder 2">
+            <a:extLst>
+              <a:ext uri="{FF2B5EF4-FFF2-40B4-BE49-F238E27FC236}">
+                <a16:creationId xmlns:a16="http://schemas.microsoft.com/office/drawing/2014/main" id="{20E3E195-E716-9566-F681-3F630822ED2E}"/>
+              </a:ext>
+            </a:extLst>
+          </p:cNvPr>
+          <p:cNvSpPr>
+            <a:spLocks noGrp="1"/>
+          </p:cNvSpPr>
+          <p:nvPr>
+            <p:ph idx="1"/>
+          </p:nvPr>
+        </p:nvSpPr>
+        <p:spPr/>
+        <p:txBody>
+          <a:bodyPr>
+            <a:normAutofit/>
+          </a:bodyPr>
+          <a:lstStyle/>
+          <a:p>
+            <a:pPr marL="0" marR="0" indent="0">
+              <a:spcBef>
+                <a:spcPts val="0"/>
+              </a:spcBef>
+              <a:spcAft>
+                <a:spcPts val="0"/>
+              </a:spcAft>
+              <a:buNone/>
+            </a:pPr>
+            <a:r>
+              <a:rPr lang="en-US" sz="2400" kern="100" dirty="0">
+                <a:effectLst/>
+                <a:latin typeface="Aptos" panose="020B0004020202020204" pitchFamily="34" charset="0"/>
+                <a:ea typeface="Aptos" panose="020B0004020202020204" pitchFamily="34" charset="0"/>
+                <a:cs typeface="Times New Roman" panose="02020603050405020304" pitchFamily="18" charset="0"/>
+              </a:rPr>
+              <a:t>SELECT *</a:t>
+            </a:r>
+          </a:p>
+          <a:p>
+            <a:pPr marL="0" marR="0" indent="0">
+              <a:spcBef>
+                <a:spcPts val="0"/>
+              </a:spcBef>
+              <a:spcAft>
+                <a:spcPts val="0"/>
+              </a:spcAft>
+              <a:buNone/>
+            </a:pPr>
+            <a:r>
+              <a:rPr lang="en-US" sz="2400" kern="100" dirty="0">
+                <a:effectLst/>
+                <a:latin typeface="Aptos" panose="020B0004020202020204" pitchFamily="34" charset="0"/>
+                <a:ea typeface="Aptos" panose="020B0004020202020204" pitchFamily="34" charset="0"/>
+                <a:cs typeface="Times New Roman" panose="02020603050405020304" pitchFamily="18" charset="0"/>
+              </a:rPr>
+              <a:t>FROM table</a:t>
+            </a:r>
+          </a:p>
+          <a:p>
+            <a:pPr marL="0" marR="0" indent="0">
+              <a:spcBef>
+                <a:spcPts val="0"/>
+              </a:spcBef>
+              <a:spcAft>
+                <a:spcPts val="0"/>
+              </a:spcAft>
+              <a:buNone/>
+            </a:pPr>
+            <a:r>
+              <a:rPr lang="en-US" sz="2400" kern="100" dirty="0">
+                <a:effectLst/>
+                <a:latin typeface="Aptos" panose="020B0004020202020204" pitchFamily="34" charset="0"/>
+                <a:ea typeface="Aptos" panose="020B0004020202020204" pitchFamily="34" charset="0"/>
+                <a:cs typeface="Times New Roman" panose="02020603050405020304" pitchFamily="18" charset="0"/>
+              </a:rPr>
+              <a:t>WHERE column1 = ? AND column2 = ? – Compound where clause</a:t>
+            </a:r>
+          </a:p>
+          <a:p>
+            <a:pPr marL="0" indent="0">
+              <a:buNone/>
+            </a:pPr>
+            <a:endParaRPr lang="en-US" sz="2400" dirty="0"/>
+          </a:p>
+          <a:p>
+            <a:pPr marL="0" indent="0">
+              <a:buNone/>
+            </a:pPr>
+            <a:r>
+              <a:rPr lang="en-US" sz="2400" dirty="0"/>
+              <a:t>SELECT * FROM items</a:t>
+            </a:r>
+          </a:p>
+          <a:p>
+            <a:pPr marL="0" indent="0">
+              <a:buNone/>
+            </a:pPr>
+            <a:r>
+              <a:rPr lang="en-US" sz="2400" dirty="0"/>
+              <a:t>WHERE price &gt; 500 AND quantity&gt;90;</a:t>
+            </a:r>
+          </a:p>
+          <a:p>
+            <a:pPr marL="0" indent="0">
+              <a:buNone/>
+            </a:pPr>
+            <a:endParaRPr lang="en-US" sz="2400" dirty="0"/>
+          </a:p>
+          <a:p>
+            <a:pPr marL="0" indent="0">
+              <a:buNone/>
+            </a:pPr>
+            <a:endParaRPr lang="en-US" sz="2400" dirty="0"/>
+          </a:p>
+        </p:txBody>
+      </p:sp>
+      <p:pic>
+        <p:nvPicPr>
+          <p:cNvPr id="5" name="Picture 4" descr="A screenshot of a computer&#10;&#10;Description automatically generated">
+            <a:extLst>
+              <a:ext uri="{FF2B5EF4-FFF2-40B4-BE49-F238E27FC236}">
+                <a16:creationId xmlns:a16="http://schemas.microsoft.com/office/drawing/2014/main" id="{8FB6CC87-374C-50F6-F28F-8BC2F6F16768}"/>
+              </a:ext>
+            </a:extLst>
+          </p:cNvPr>
+          <p:cNvPicPr>
+            <a:picLocks noChangeAspect="1"/>
+          </p:cNvPicPr>
+          <p:nvPr/>
+        </p:nvPicPr>
+        <p:blipFill>
+          <a:blip r:embed="rId2"/>
+          <a:stretch>
+            <a:fillRect/>
+          </a:stretch>
+        </p:blipFill>
+        <p:spPr>
+          <a:xfrm>
+            <a:off x="887955" y="4589309"/>
+            <a:ext cx="4549483" cy="1310449"/>
+          </a:xfrm>
+          <a:prstGeom prst="rect">
+            <a:avLst/>
+          </a:prstGeom>
+        </p:spPr>
+      </p:pic>
+    </p:spTree>
+    <p:extLst>
+      <p:ext uri="{BB962C8B-B14F-4D97-AF65-F5344CB8AC3E}">
+        <p14:creationId xmlns:p14="http://schemas.microsoft.com/office/powerpoint/2010/main" val="3748167887"/>
+      </p:ext>
+    </p:extLst>
+  </p:cSld>
+  <p:clrMapOvr>
+    <a:masterClrMapping/>
+  </p:clrMapOvr>
+</p:sld>
+</file>
+
+<file path=ppt/slides/slide11.xml><?xml version="1.0" encoding="utf-8"?>
+<p:sld xmlns:a="http://schemas.openxmlformats.org/drawingml/2006/main" xmlns:r="http://schemas.openxmlformats.org/officeDocument/2006/relationships" xmlns:p="http://schemas.openxmlformats.org/presentationml/2006/main">
+  <p:cSld>
+    <p:spTree>
+      <p:nvGrpSpPr>
+        <p:cNvPr id="1" name=""/>
+        <p:cNvGrpSpPr/>
+        <p:nvPr/>
+      </p:nvGrpSpPr>
+      <p:grpSpPr>
+        <a:xfrm>
+          <a:off x="0" y="0"/>
+          <a:ext cx="0" cy="0"/>
+          <a:chOff x="0" y="0"/>
+          <a:chExt cx="0" cy="0"/>
+        </a:xfrm>
+      </p:grpSpPr>
+      <p:sp>
+        <p:nvSpPr>
+          <p:cNvPr id="2" name="Title 1">
+            <a:extLst>
+              <a:ext uri="{FF2B5EF4-FFF2-40B4-BE49-F238E27FC236}">
                 <a16:creationId xmlns:a16="http://schemas.microsoft.com/office/drawing/2014/main" id="{EB510167-1E27-A869-4AA0-87E04E168F9E}"/>
               </a:ext>
             </a:extLst>
@@ -3650,7 +3866,7 @@
 </p:sld>
 </file>
 
-<file path=ppt/slides/slide11.xml><?xml version="1.0" encoding="utf-8"?>
+<file path=ppt/slides/slide12.xml><?xml version="1.0" encoding="utf-8"?>
 <p:sld xmlns:a="http://schemas.openxmlformats.org/drawingml/2006/main" xmlns:r="http://schemas.openxmlformats.org/officeDocument/2006/relationships" xmlns:p="http://schemas.openxmlformats.org/presentationml/2006/main">
   <p:cSld>
     <p:spTree>
@@ -3861,7 +4077,7 @@
 </p:sld>
 </file>
 
-<file path=ppt/slides/slide12.xml><?xml version="1.0" encoding="utf-8"?>
+<file path=ppt/slides/slide13.xml><?xml version="1.0" encoding="utf-8"?>
 <p:sld xmlns:a="http://schemas.openxmlformats.org/drawingml/2006/main" xmlns:r="http://schemas.openxmlformats.org/officeDocument/2006/relationships" xmlns:p="http://schemas.openxmlformats.org/presentationml/2006/main">
   <p:cSld>
     <p:spTree>
@@ -4111,7 +4327,7 @@
 </p:sld>
 </file>
 
-<file path=ppt/slides/slide13.xml><?xml version="1.0" encoding="utf-8"?>
+<file path=ppt/slides/slide14.xml><?xml version="1.0" encoding="utf-8"?>
 <p:sld xmlns:a="http://schemas.openxmlformats.org/drawingml/2006/main" xmlns:r="http://schemas.openxmlformats.org/officeDocument/2006/relationships" xmlns:p="http://schemas.openxmlformats.org/presentationml/2006/main">
   <p:cSld>
     <p:spTree>
@@ -4273,7 +4489,7 @@
             </a:pPr>
             <a:r>
               <a:rPr lang="en-US" sz="2800" dirty="0"/>
-              <a:t>ORDER BY price, quantity</a:t>
+              <a:t>ORDER BY price, quantity ASC</a:t>
             </a:r>
             <a:endParaRPr lang="en-US" dirty="0"/>
           </a:p>
@@ -4322,7 +4538,7 @@
 </p:sld>
 </file>
 
-<file path=ppt/slides/slide14.xml><?xml version="1.0" encoding="utf-8"?>
+<file path=ppt/slides/slide15.xml><?xml version="1.0" encoding="utf-8"?>
 <p:sld xmlns:a="http://schemas.openxmlformats.org/drawingml/2006/main" xmlns:r="http://schemas.openxmlformats.org/officeDocument/2006/relationships" xmlns:p="http://schemas.openxmlformats.org/presentationml/2006/main">
   <p:cSld>
     <p:spTree>
@@ -4468,7 +4684,167 @@
 </p:sld>
 </file>
 
-<file path=ppt/slides/slide15.xml><?xml version="1.0" encoding="utf-8"?>
+<file path=ppt/slides/slide16.xml><?xml version="1.0" encoding="utf-8"?>
+<p:sld xmlns:a="http://schemas.openxmlformats.org/drawingml/2006/main" xmlns:r="http://schemas.openxmlformats.org/officeDocument/2006/relationships" xmlns:p="http://schemas.openxmlformats.org/presentationml/2006/main">
+  <p:cSld>
+    <p:spTree>
+      <p:nvGrpSpPr>
+        <p:cNvPr id="1" name="">
+          <a:extLst>
+            <a:ext uri="{FF2B5EF4-FFF2-40B4-BE49-F238E27FC236}">
+              <a16:creationId xmlns:a16="http://schemas.microsoft.com/office/drawing/2014/main" id="{03A1D995-52D6-76F2-4B86-AC896C9492D0}"/>
+            </a:ext>
+          </a:extLst>
+        </p:cNvPr>
+        <p:cNvGrpSpPr/>
+        <p:nvPr/>
+      </p:nvGrpSpPr>
+      <p:grpSpPr>
+        <a:xfrm>
+          <a:off x="0" y="0"/>
+          <a:ext cx="0" cy="0"/>
+          <a:chOff x="0" y="0"/>
+          <a:chExt cx="0" cy="0"/>
+        </a:xfrm>
+      </p:grpSpPr>
+      <p:sp>
+        <p:nvSpPr>
+          <p:cNvPr id="2" name="Title 1">
+            <a:extLst>
+              <a:ext uri="{FF2B5EF4-FFF2-40B4-BE49-F238E27FC236}">
+                <a16:creationId xmlns:a16="http://schemas.microsoft.com/office/drawing/2014/main" id="{F62A355C-46EF-6455-E229-B209668A4DAA}"/>
+              </a:ext>
+            </a:extLst>
+          </p:cNvPr>
+          <p:cNvSpPr>
+            <a:spLocks noGrp="1"/>
+          </p:cNvSpPr>
+          <p:nvPr>
+            <p:ph type="title"/>
+          </p:nvPr>
+        </p:nvSpPr>
+        <p:spPr/>
+        <p:txBody>
+          <a:bodyPr/>
+          <a:lstStyle/>
+          <a:p>
+            <a:r>
+              <a:rPr lang="en-US" dirty="0"/>
+              <a:t>Limiting number of rows (LIMIT)</a:t>
+            </a:r>
+          </a:p>
+        </p:txBody>
+      </p:sp>
+      <p:sp>
+        <p:nvSpPr>
+          <p:cNvPr id="3" name="Content Placeholder 2">
+            <a:extLst>
+              <a:ext uri="{FF2B5EF4-FFF2-40B4-BE49-F238E27FC236}">
+                <a16:creationId xmlns:a16="http://schemas.microsoft.com/office/drawing/2014/main" id="{7DDB8668-CE97-5C25-3C9A-E7E748832691}"/>
+              </a:ext>
+            </a:extLst>
+          </p:cNvPr>
+          <p:cNvSpPr>
+            <a:spLocks noGrp="1"/>
+          </p:cNvSpPr>
+          <p:nvPr>
+            <p:ph idx="1"/>
+          </p:nvPr>
+        </p:nvSpPr>
+        <p:spPr/>
+        <p:txBody>
+          <a:bodyPr/>
+          <a:lstStyle/>
+          <a:p>
+            <a:pPr marL="0" indent="0">
+              <a:buNone/>
+            </a:pPr>
+            <a:r>
+              <a:rPr lang="en-US" dirty="0"/>
+              <a:t>SELECT * FROM table LIMIT n</a:t>
+            </a:r>
+          </a:p>
+          <a:p>
+            <a:pPr marL="0" indent="0">
+              <a:buNone/>
+            </a:pPr>
+            <a:endParaRPr lang="en-US" dirty="0"/>
+          </a:p>
+          <a:p>
+            <a:pPr marL="0" indent="0">
+              <a:buNone/>
+            </a:pPr>
+            <a:r>
+              <a:rPr lang="en-US" dirty="0"/>
+              <a:t>SELECT * FROM items ORDER BY </a:t>
+            </a:r>
+            <a:r>
+              <a:rPr lang="en-US"/>
+              <a:t>price ASC </a:t>
+            </a:r>
+            <a:r>
+              <a:rPr lang="en-US" dirty="0"/>
+              <a:t>LIMIT 1;</a:t>
+            </a:r>
+          </a:p>
+          <a:p>
+            <a:pPr marL="0" indent="0">
+              <a:buNone/>
+            </a:pPr>
+            <a:endParaRPr lang="en-US" dirty="0"/>
+          </a:p>
+          <a:p>
+            <a:pPr marL="0" indent="0">
+              <a:buNone/>
+            </a:pPr>
+            <a:endParaRPr lang="en-US" dirty="0"/>
+          </a:p>
+        </p:txBody>
+      </p:sp>
+      <p:pic>
+        <p:nvPicPr>
+          <p:cNvPr id="5" name="Picture 4" descr="A screenshot of a computer&#10;&#10;Description automatically generated">
+            <a:extLst>
+              <a:ext uri="{FF2B5EF4-FFF2-40B4-BE49-F238E27FC236}">
+                <a16:creationId xmlns:a16="http://schemas.microsoft.com/office/drawing/2014/main" id="{4F621D76-E63E-A6EB-1A54-107CC11BCA73}"/>
+              </a:ext>
+            </a:extLst>
+          </p:cNvPr>
+          <p:cNvPicPr>
+            <a:picLocks noChangeAspect="1"/>
+          </p:cNvPicPr>
+          <p:nvPr/>
+        </p:nvPicPr>
+        <p:blipFill>
+          <a:blip r:embed="rId2"/>
+          <a:stretch>
+            <a:fillRect/>
+          </a:stretch>
+        </p:blipFill>
+        <p:spPr>
+          <a:xfrm>
+            <a:off x="882440" y="3984641"/>
+            <a:ext cx="4501014" cy="1149716"/>
+          </a:xfrm>
+          <a:prstGeom prst="rect">
+            <a:avLst/>
+          </a:prstGeom>
+        </p:spPr>
+      </p:pic>
+    </p:spTree>
+    <p:extLst>
+      <p:ext uri="{BB962C8B-B14F-4D97-AF65-F5344CB8AC3E}">
+        <p14:creationId xmlns:p14="http://schemas.microsoft.com/office/powerpoint/2010/main" val="2368424483"/>
+      </p:ext>
+    </p:extLst>
+  </p:cSld>
+  <p:clrMapOvr>
+    <a:masterClrMapping/>
+  </p:clrMapOvr>
+</p:sld>
+</file>
+
+<file path=ppt/slides/slide17.xml><?xml version="1.0" encoding="utf-8"?>
 <p:sld xmlns:a="http://schemas.openxmlformats.org/drawingml/2006/main" xmlns:r="http://schemas.openxmlformats.org/officeDocument/2006/relationships" xmlns:p="http://schemas.openxmlformats.org/presentationml/2006/main">
   <p:cSld>
     <p:spTree>
@@ -4620,7 +4996,7 @@
 </p:sld>
 </file>
 
-<file path=ppt/slides/slide16.xml><?xml version="1.0" encoding="utf-8"?>
+<file path=ppt/slides/slide18.xml><?xml version="1.0" encoding="utf-8"?>
 <p:sld xmlns:a="http://schemas.openxmlformats.org/drawingml/2006/main" xmlns:r="http://schemas.openxmlformats.org/officeDocument/2006/relationships" xmlns:p="http://schemas.openxmlformats.org/presentationml/2006/main">
   <p:cSld>
     <p:spTree>
@@ -4703,13 +5079,8 @@
             </a:pPr>
             <a:r>
               <a:rPr lang="en-US" dirty="0"/>
-              <a:t>SELECT * FROM </a:t>
-            </a:r>
-            <a:r>
-              <a:rPr lang="en-US" dirty="0" err="1"/>
-              <a:t>appjedin_student_temp.products</a:t>
-            </a:r>
-            <a:endParaRPr lang="en-US" dirty="0"/>
+              <a:t>SELECT * FROM products</a:t>
+            </a:r>
           </a:p>
           <a:p>
             <a:pPr marL="0" indent="0">
@@ -4785,7 +5156,7 @@
 </p:sld>
 </file>
 
-<file path=ppt/slides/slide17.xml><?xml version="1.0" encoding="utf-8"?>
+<file path=ppt/slides/slide19.xml><?xml version="1.0" encoding="utf-8"?>
 <p:sld xmlns:a="http://schemas.openxmlformats.org/drawingml/2006/main" xmlns:r="http://schemas.openxmlformats.org/officeDocument/2006/relationships" xmlns:p="http://schemas.openxmlformats.org/presentationml/2006/main">
   <p:cSld>
     <p:spTree>
@@ -4941,308 +5312,6 @@
     <p:extLst>
       <p:ext uri="{BB962C8B-B14F-4D97-AF65-F5344CB8AC3E}">
         <p14:creationId xmlns:p14="http://schemas.microsoft.com/office/powerpoint/2010/main" val="2017781753"/>
-      </p:ext>
-    </p:extLst>
-  </p:cSld>
-  <p:clrMapOvr>
-    <a:masterClrMapping/>
-  </p:clrMapOvr>
-</p:sld>
-</file>
-
-<file path=ppt/slides/slide18.xml><?xml version="1.0" encoding="utf-8"?>
-<p:sld xmlns:a="http://schemas.openxmlformats.org/drawingml/2006/main" xmlns:r="http://schemas.openxmlformats.org/officeDocument/2006/relationships" xmlns:p="http://schemas.openxmlformats.org/presentationml/2006/main">
-  <p:cSld>
-    <p:spTree>
-      <p:nvGrpSpPr>
-        <p:cNvPr id="1" name="">
-          <a:extLst>
-            <a:ext uri="{FF2B5EF4-FFF2-40B4-BE49-F238E27FC236}">
-              <a16:creationId xmlns:a16="http://schemas.microsoft.com/office/drawing/2014/main" id="{59FC5904-E6D6-FBE8-2573-DEACBC9337DA}"/>
-            </a:ext>
-          </a:extLst>
-        </p:cNvPr>
-        <p:cNvGrpSpPr/>
-        <p:nvPr/>
-      </p:nvGrpSpPr>
-      <p:grpSpPr>
-        <a:xfrm>
-          <a:off x="0" y="0"/>
-          <a:ext cx="0" cy="0"/>
-          <a:chOff x="0" y="0"/>
-          <a:chExt cx="0" cy="0"/>
-        </a:xfrm>
-      </p:grpSpPr>
-      <p:sp>
-        <p:nvSpPr>
-          <p:cNvPr id="2" name="Title 1">
-            <a:extLst>
-              <a:ext uri="{FF2B5EF4-FFF2-40B4-BE49-F238E27FC236}">
-                <a16:creationId xmlns:a16="http://schemas.microsoft.com/office/drawing/2014/main" id="{4AFCAFB2-551D-60C3-0541-E2C34EEDFBD1}"/>
-              </a:ext>
-            </a:extLst>
-          </p:cNvPr>
-          <p:cNvSpPr>
-            <a:spLocks noGrp="1"/>
-          </p:cNvSpPr>
-          <p:nvPr>
-            <p:ph type="title"/>
-          </p:nvPr>
-        </p:nvSpPr>
-        <p:spPr/>
-        <p:txBody>
-          <a:bodyPr/>
-          <a:lstStyle/>
-          <a:p>
-            <a:r>
-              <a:rPr lang="en-US" dirty="0"/>
-              <a:t>Example</a:t>
-            </a:r>
-          </a:p>
-        </p:txBody>
-      </p:sp>
-      <p:sp>
-        <p:nvSpPr>
-          <p:cNvPr id="3" name="Content Placeholder 2">
-            <a:extLst>
-              <a:ext uri="{FF2B5EF4-FFF2-40B4-BE49-F238E27FC236}">
-                <a16:creationId xmlns:a16="http://schemas.microsoft.com/office/drawing/2014/main" id="{3FE4ED21-89F6-E734-9CA3-DAC065AF6C56}"/>
-              </a:ext>
-            </a:extLst>
-          </p:cNvPr>
-          <p:cNvSpPr>
-            <a:spLocks noGrp="1"/>
-          </p:cNvSpPr>
-          <p:nvPr>
-            <p:ph idx="1"/>
-          </p:nvPr>
-        </p:nvSpPr>
-        <p:spPr/>
-        <p:txBody>
-          <a:bodyPr/>
-          <a:lstStyle/>
-          <a:p>
-            <a:pPr marL="0" indent="0">
-              <a:buNone/>
-            </a:pPr>
-            <a:endParaRPr lang="en-US" dirty="0"/>
-          </a:p>
-          <a:p>
-            <a:pPr marL="0" indent="0">
-              <a:buNone/>
-            </a:pPr>
-            <a:r>
-              <a:rPr lang="en-US" dirty="0"/>
-              <a:t>SELECT * FROM </a:t>
-            </a:r>
-            <a:r>
-              <a:rPr lang="en-US" dirty="0" err="1"/>
-              <a:t>appjedin_student_temp.products</a:t>
-            </a:r>
-            <a:endParaRPr lang="en-US" dirty="0"/>
-          </a:p>
-          <a:p>
-            <a:pPr marL="0" indent="0">
-              <a:buNone/>
-            </a:pPr>
-            <a:r>
-              <a:rPr lang="en-US" dirty="0"/>
-              <a:t>WHERE name LIKE '%shirt%';</a:t>
-            </a:r>
-          </a:p>
-          <a:p>
-            <a:pPr marL="0" indent="0">
-              <a:buNone/>
-            </a:pPr>
-            <a:endParaRPr lang="en-US" dirty="0"/>
-          </a:p>
-        </p:txBody>
-      </p:sp>
-      <p:pic>
-        <p:nvPicPr>
-          <p:cNvPr id="5" name="Picture 4" descr="A table with numbers and text&#10;&#10;Description automatically generated">
-            <a:extLst>
-              <a:ext uri="{FF2B5EF4-FFF2-40B4-BE49-F238E27FC236}">
-                <a16:creationId xmlns:a16="http://schemas.microsoft.com/office/drawing/2014/main" id="{4C3EBB23-EAFB-F36F-85DA-DE76715B83B7}"/>
-              </a:ext>
-            </a:extLst>
-          </p:cNvPr>
-          <p:cNvPicPr>
-            <a:picLocks noChangeAspect="1"/>
-          </p:cNvPicPr>
-          <p:nvPr/>
-        </p:nvPicPr>
-        <p:blipFill>
-          <a:blip r:embed="rId2"/>
-          <a:stretch>
-            <a:fillRect/>
-          </a:stretch>
-        </p:blipFill>
-        <p:spPr>
-          <a:xfrm>
-            <a:off x="762628" y="3854240"/>
-            <a:ext cx="7772400" cy="1556803"/>
-          </a:xfrm>
-          <a:prstGeom prst="rect">
-            <a:avLst/>
-          </a:prstGeom>
-        </p:spPr>
-      </p:pic>
-    </p:spTree>
-    <p:extLst>
-      <p:ext uri="{BB962C8B-B14F-4D97-AF65-F5344CB8AC3E}">
-        <p14:creationId xmlns:p14="http://schemas.microsoft.com/office/powerpoint/2010/main" val="615584266"/>
-      </p:ext>
-    </p:extLst>
-  </p:cSld>
-  <p:clrMapOvr>
-    <a:masterClrMapping/>
-  </p:clrMapOvr>
-</p:sld>
-</file>
-
-<file path=ppt/slides/slide19.xml><?xml version="1.0" encoding="utf-8"?>
-<p:sld xmlns:a="http://schemas.openxmlformats.org/drawingml/2006/main" xmlns:r="http://schemas.openxmlformats.org/officeDocument/2006/relationships" xmlns:p="http://schemas.openxmlformats.org/presentationml/2006/main">
-  <p:cSld>
-    <p:spTree>
-      <p:nvGrpSpPr>
-        <p:cNvPr id="1" name="">
-          <a:extLst>
-            <a:ext uri="{FF2B5EF4-FFF2-40B4-BE49-F238E27FC236}">
-              <a16:creationId xmlns:a16="http://schemas.microsoft.com/office/drawing/2014/main" id="{8C122B5D-425C-98FB-B467-03DF952A725A}"/>
-            </a:ext>
-          </a:extLst>
-        </p:cNvPr>
-        <p:cNvGrpSpPr/>
-        <p:nvPr/>
-      </p:nvGrpSpPr>
-      <p:grpSpPr>
-        <a:xfrm>
-          <a:off x="0" y="0"/>
-          <a:ext cx="0" cy="0"/>
-          <a:chOff x="0" y="0"/>
-          <a:chExt cx="0" cy="0"/>
-        </a:xfrm>
-      </p:grpSpPr>
-      <p:sp>
-        <p:nvSpPr>
-          <p:cNvPr id="2" name="Title 1">
-            <a:extLst>
-              <a:ext uri="{FF2B5EF4-FFF2-40B4-BE49-F238E27FC236}">
-                <a16:creationId xmlns:a16="http://schemas.microsoft.com/office/drawing/2014/main" id="{ED51BA57-CBB0-23B5-92EF-6BD3D65CE059}"/>
-              </a:ext>
-            </a:extLst>
-          </p:cNvPr>
-          <p:cNvSpPr>
-            <a:spLocks noGrp="1"/>
-          </p:cNvSpPr>
-          <p:nvPr>
-            <p:ph type="title"/>
-          </p:nvPr>
-        </p:nvSpPr>
-        <p:spPr/>
-        <p:txBody>
-          <a:bodyPr/>
-          <a:lstStyle/>
-          <a:p>
-            <a:r>
-              <a:rPr lang="en-US" dirty="0"/>
-              <a:t>NOT LIKE</a:t>
-            </a:r>
-          </a:p>
-        </p:txBody>
-      </p:sp>
-      <p:sp>
-        <p:nvSpPr>
-          <p:cNvPr id="3" name="Content Placeholder 2">
-            <a:extLst>
-              <a:ext uri="{FF2B5EF4-FFF2-40B4-BE49-F238E27FC236}">
-                <a16:creationId xmlns:a16="http://schemas.microsoft.com/office/drawing/2014/main" id="{D1D935F2-3125-65FC-3212-4FB8D0AB3958}"/>
-              </a:ext>
-            </a:extLst>
-          </p:cNvPr>
-          <p:cNvSpPr>
-            <a:spLocks noGrp="1"/>
-          </p:cNvSpPr>
-          <p:nvPr>
-            <p:ph idx="1"/>
-          </p:nvPr>
-        </p:nvSpPr>
-        <p:spPr/>
-        <p:txBody>
-          <a:bodyPr/>
-          <a:lstStyle/>
-          <a:p>
-            <a:pPr marL="0" indent="0">
-              <a:buNone/>
-            </a:pPr>
-            <a:endParaRPr lang="en-US" dirty="0"/>
-          </a:p>
-          <a:p>
-            <a:pPr marL="0" indent="0">
-              <a:buNone/>
-            </a:pPr>
-            <a:r>
-              <a:rPr lang="en-US" dirty="0"/>
-              <a:t>SELECT * FROM </a:t>
-            </a:r>
-            <a:r>
-              <a:rPr lang="en-US" dirty="0" err="1"/>
-              <a:t>appjedin_student_temp.products</a:t>
-            </a:r>
-            <a:endParaRPr lang="en-US" dirty="0"/>
-          </a:p>
-          <a:p>
-            <a:pPr marL="0" indent="0">
-              <a:buNone/>
-            </a:pPr>
-            <a:r>
-              <a:rPr lang="en-US" dirty="0"/>
-              <a:t>WHERE name NOT LIKE '%shirt%';</a:t>
-            </a:r>
-          </a:p>
-          <a:p>
-            <a:pPr marL="0" indent="0">
-              <a:buNone/>
-            </a:pPr>
-            <a:endParaRPr lang="en-US" dirty="0"/>
-          </a:p>
-        </p:txBody>
-      </p:sp>
-      <p:pic>
-        <p:nvPicPr>
-          <p:cNvPr id="6" name="Picture 5" descr="A white table with black text&#10;&#10;Description automatically generated">
-            <a:extLst>
-              <a:ext uri="{FF2B5EF4-FFF2-40B4-BE49-F238E27FC236}">
-                <a16:creationId xmlns:a16="http://schemas.microsoft.com/office/drawing/2014/main" id="{BAADF660-DA71-9113-6111-4FE2647519FC}"/>
-              </a:ext>
-            </a:extLst>
-          </p:cNvPr>
-          <p:cNvPicPr>
-            <a:picLocks noChangeAspect="1"/>
-          </p:cNvPicPr>
-          <p:nvPr/>
-        </p:nvPicPr>
-        <p:blipFill>
-          <a:blip r:embed="rId2"/>
-          <a:stretch>
-            <a:fillRect/>
-          </a:stretch>
-        </p:blipFill>
-        <p:spPr>
-          <a:xfrm>
-            <a:off x="838200" y="3568491"/>
-            <a:ext cx="7772400" cy="2120822"/>
-          </a:xfrm>
-          <a:prstGeom prst="rect">
-            <a:avLst/>
-          </a:prstGeom>
-        </p:spPr>
-      </p:pic>
-    </p:spTree>
-    <p:extLst>
-      <p:ext uri="{BB962C8B-B14F-4D97-AF65-F5344CB8AC3E}">
-        <p14:creationId xmlns:p14="http://schemas.microsoft.com/office/powerpoint/2010/main" val="2830112659"/>
       </p:ext>
     </p:extLst>
   </p:cSld>
@@ -5411,6 +5480,308 @@
   <p:cSld>
     <p:spTree>
       <p:nvGrpSpPr>
+        <p:cNvPr id="1" name="">
+          <a:extLst>
+            <a:ext uri="{FF2B5EF4-FFF2-40B4-BE49-F238E27FC236}">
+              <a16:creationId xmlns:a16="http://schemas.microsoft.com/office/drawing/2014/main" id="{59FC5904-E6D6-FBE8-2573-DEACBC9337DA}"/>
+            </a:ext>
+          </a:extLst>
+        </p:cNvPr>
+        <p:cNvGrpSpPr/>
+        <p:nvPr/>
+      </p:nvGrpSpPr>
+      <p:grpSpPr>
+        <a:xfrm>
+          <a:off x="0" y="0"/>
+          <a:ext cx="0" cy="0"/>
+          <a:chOff x="0" y="0"/>
+          <a:chExt cx="0" cy="0"/>
+        </a:xfrm>
+      </p:grpSpPr>
+      <p:sp>
+        <p:nvSpPr>
+          <p:cNvPr id="2" name="Title 1">
+            <a:extLst>
+              <a:ext uri="{FF2B5EF4-FFF2-40B4-BE49-F238E27FC236}">
+                <a16:creationId xmlns:a16="http://schemas.microsoft.com/office/drawing/2014/main" id="{4AFCAFB2-551D-60C3-0541-E2C34EEDFBD1}"/>
+              </a:ext>
+            </a:extLst>
+          </p:cNvPr>
+          <p:cNvSpPr>
+            <a:spLocks noGrp="1"/>
+          </p:cNvSpPr>
+          <p:nvPr>
+            <p:ph type="title"/>
+          </p:nvPr>
+        </p:nvSpPr>
+        <p:spPr/>
+        <p:txBody>
+          <a:bodyPr/>
+          <a:lstStyle/>
+          <a:p>
+            <a:r>
+              <a:rPr lang="en-US" dirty="0"/>
+              <a:t>Example</a:t>
+            </a:r>
+          </a:p>
+        </p:txBody>
+      </p:sp>
+      <p:sp>
+        <p:nvSpPr>
+          <p:cNvPr id="3" name="Content Placeholder 2">
+            <a:extLst>
+              <a:ext uri="{FF2B5EF4-FFF2-40B4-BE49-F238E27FC236}">
+                <a16:creationId xmlns:a16="http://schemas.microsoft.com/office/drawing/2014/main" id="{3FE4ED21-89F6-E734-9CA3-DAC065AF6C56}"/>
+              </a:ext>
+            </a:extLst>
+          </p:cNvPr>
+          <p:cNvSpPr>
+            <a:spLocks noGrp="1"/>
+          </p:cNvSpPr>
+          <p:nvPr>
+            <p:ph idx="1"/>
+          </p:nvPr>
+        </p:nvSpPr>
+        <p:spPr/>
+        <p:txBody>
+          <a:bodyPr/>
+          <a:lstStyle/>
+          <a:p>
+            <a:pPr marL="0" indent="0">
+              <a:buNone/>
+            </a:pPr>
+            <a:endParaRPr lang="en-US" dirty="0"/>
+          </a:p>
+          <a:p>
+            <a:pPr marL="0" indent="0">
+              <a:buNone/>
+            </a:pPr>
+            <a:r>
+              <a:rPr lang="en-US" dirty="0"/>
+              <a:t>SELECT * FROM </a:t>
+            </a:r>
+            <a:r>
+              <a:rPr lang="en-US" dirty="0" err="1"/>
+              <a:t>appjedin_student_temp.products</a:t>
+            </a:r>
+            <a:endParaRPr lang="en-US" dirty="0"/>
+          </a:p>
+          <a:p>
+            <a:pPr marL="0" indent="0">
+              <a:buNone/>
+            </a:pPr>
+            <a:r>
+              <a:rPr lang="en-US" dirty="0"/>
+              <a:t>WHERE name LIKE '%shirt%';</a:t>
+            </a:r>
+          </a:p>
+          <a:p>
+            <a:pPr marL="0" indent="0">
+              <a:buNone/>
+            </a:pPr>
+            <a:endParaRPr lang="en-US" dirty="0"/>
+          </a:p>
+        </p:txBody>
+      </p:sp>
+      <p:pic>
+        <p:nvPicPr>
+          <p:cNvPr id="5" name="Picture 4" descr="A table with numbers and text&#10;&#10;Description automatically generated">
+            <a:extLst>
+              <a:ext uri="{FF2B5EF4-FFF2-40B4-BE49-F238E27FC236}">
+                <a16:creationId xmlns:a16="http://schemas.microsoft.com/office/drawing/2014/main" id="{4C3EBB23-EAFB-F36F-85DA-DE76715B83B7}"/>
+              </a:ext>
+            </a:extLst>
+          </p:cNvPr>
+          <p:cNvPicPr>
+            <a:picLocks noChangeAspect="1"/>
+          </p:cNvPicPr>
+          <p:nvPr/>
+        </p:nvPicPr>
+        <p:blipFill>
+          <a:blip r:embed="rId2"/>
+          <a:stretch>
+            <a:fillRect/>
+          </a:stretch>
+        </p:blipFill>
+        <p:spPr>
+          <a:xfrm>
+            <a:off x="762628" y="3854240"/>
+            <a:ext cx="7772400" cy="1556803"/>
+          </a:xfrm>
+          <a:prstGeom prst="rect">
+            <a:avLst/>
+          </a:prstGeom>
+        </p:spPr>
+      </p:pic>
+    </p:spTree>
+    <p:extLst>
+      <p:ext uri="{BB962C8B-B14F-4D97-AF65-F5344CB8AC3E}">
+        <p14:creationId xmlns:p14="http://schemas.microsoft.com/office/powerpoint/2010/main" val="615584266"/>
+      </p:ext>
+    </p:extLst>
+  </p:cSld>
+  <p:clrMapOvr>
+    <a:masterClrMapping/>
+  </p:clrMapOvr>
+</p:sld>
+</file>
+
+<file path=ppt/slides/slide21.xml><?xml version="1.0" encoding="utf-8"?>
+<p:sld xmlns:a="http://schemas.openxmlformats.org/drawingml/2006/main" xmlns:r="http://schemas.openxmlformats.org/officeDocument/2006/relationships" xmlns:p="http://schemas.openxmlformats.org/presentationml/2006/main">
+  <p:cSld>
+    <p:spTree>
+      <p:nvGrpSpPr>
+        <p:cNvPr id="1" name="">
+          <a:extLst>
+            <a:ext uri="{FF2B5EF4-FFF2-40B4-BE49-F238E27FC236}">
+              <a16:creationId xmlns:a16="http://schemas.microsoft.com/office/drawing/2014/main" id="{8C122B5D-425C-98FB-B467-03DF952A725A}"/>
+            </a:ext>
+          </a:extLst>
+        </p:cNvPr>
+        <p:cNvGrpSpPr/>
+        <p:nvPr/>
+      </p:nvGrpSpPr>
+      <p:grpSpPr>
+        <a:xfrm>
+          <a:off x="0" y="0"/>
+          <a:ext cx="0" cy="0"/>
+          <a:chOff x="0" y="0"/>
+          <a:chExt cx="0" cy="0"/>
+        </a:xfrm>
+      </p:grpSpPr>
+      <p:sp>
+        <p:nvSpPr>
+          <p:cNvPr id="2" name="Title 1">
+            <a:extLst>
+              <a:ext uri="{FF2B5EF4-FFF2-40B4-BE49-F238E27FC236}">
+                <a16:creationId xmlns:a16="http://schemas.microsoft.com/office/drawing/2014/main" id="{ED51BA57-CBB0-23B5-92EF-6BD3D65CE059}"/>
+              </a:ext>
+            </a:extLst>
+          </p:cNvPr>
+          <p:cNvSpPr>
+            <a:spLocks noGrp="1"/>
+          </p:cNvSpPr>
+          <p:nvPr>
+            <p:ph type="title"/>
+          </p:nvPr>
+        </p:nvSpPr>
+        <p:spPr/>
+        <p:txBody>
+          <a:bodyPr/>
+          <a:lstStyle/>
+          <a:p>
+            <a:r>
+              <a:rPr lang="en-US" dirty="0"/>
+              <a:t>NOT LIKE</a:t>
+            </a:r>
+          </a:p>
+        </p:txBody>
+      </p:sp>
+      <p:sp>
+        <p:nvSpPr>
+          <p:cNvPr id="3" name="Content Placeholder 2">
+            <a:extLst>
+              <a:ext uri="{FF2B5EF4-FFF2-40B4-BE49-F238E27FC236}">
+                <a16:creationId xmlns:a16="http://schemas.microsoft.com/office/drawing/2014/main" id="{D1D935F2-3125-65FC-3212-4FB8D0AB3958}"/>
+              </a:ext>
+            </a:extLst>
+          </p:cNvPr>
+          <p:cNvSpPr>
+            <a:spLocks noGrp="1"/>
+          </p:cNvSpPr>
+          <p:nvPr>
+            <p:ph idx="1"/>
+          </p:nvPr>
+        </p:nvSpPr>
+        <p:spPr/>
+        <p:txBody>
+          <a:bodyPr/>
+          <a:lstStyle/>
+          <a:p>
+            <a:pPr marL="0" indent="0">
+              <a:buNone/>
+            </a:pPr>
+            <a:endParaRPr lang="en-US" dirty="0"/>
+          </a:p>
+          <a:p>
+            <a:pPr marL="0" indent="0">
+              <a:buNone/>
+            </a:pPr>
+            <a:r>
+              <a:rPr lang="en-US" dirty="0"/>
+              <a:t>SELECT * FROM </a:t>
+            </a:r>
+            <a:r>
+              <a:rPr lang="en-US" dirty="0" err="1"/>
+              <a:t>appjedin_student_temp.products</a:t>
+            </a:r>
+            <a:endParaRPr lang="en-US" dirty="0"/>
+          </a:p>
+          <a:p>
+            <a:pPr marL="0" indent="0">
+              <a:buNone/>
+            </a:pPr>
+            <a:r>
+              <a:rPr lang="en-US" dirty="0"/>
+              <a:t>WHERE name NOT LIKE '%shirt%';</a:t>
+            </a:r>
+          </a:p>
+          <a:p>
+            <a:pPr marL="0" indent="0">
+              <a:buNone/>
+            </a:pPr>
+            <a:endParaRPr lang="en-US" dirty="0"/>
+          </a:p>
+        </p:txBody>
+      </p:sp>
+      <p:pic>
+        <p:nvPicPr>
+          <p:cNvPr id="6" name="Picture 5" descr="A white table with black text&#10;&#10;Description automatically generated">
+            <a:extLst>
+              <a:ext uri="{FF2B5EF4-FFF2-40B4-BE49-F238E27FC236}">
+                <a16:creationId xmlns:a16="http://schemas.microsoft.com/office/drawing/2014/main" id="{BAADF660-DA71-9113-6111-4FE2647519FC}"/>
+              </a:ext>
+            </a:extLst>
+          </p:cNvPr>
+          <p:cNvPicPr>
+            <a:picLocks noChangeAspect="1"/>
+          </p:cNvPicPr>
+          <p:nvPr/>
+        </p:nvPicPr>
+        <p:blipFill>
+          <a:blip r:embed="rId2"/>
+          <a:stretch>
+            <a:fillRect/>
+          </a:stretch>
+        </p:blipFill>
+        <p:spPr>
+          <a:xfrm>
+            <a:off x="838200" y="3568491"/>
+            <a:ext cx="7772400" cy="2120822"/>
+          </a:xfrm>
+          <a:prstGeom prst="rect">
+            <a:avLst/>
+          </a:prstGeom>
+        </p:spPr>
+      </p:pic>
+    </p:spTree>
+    <p:extLst>
+      <p:ext uri="{BB962C8B-B14F-4D97-AF65-F5344CB8AC3E}">
+        <p14:creationId xmlns:p14="http://schemas.microsoft.com/office/powerpoint/2010/main" val="2830112659"/>
+      </p:ext>
+    </p:extLst>
+  </p:cSld>
+  <p:clrMapOvr>
+    <a:masterClrMapping/>
+  </p:clrMapOvr>
+</p:sld>
+</file>
+
+<file path=ppt/slides/slide22.xml><?xml version="1.0" encoding="utf-8"?>
+<p:sld xmlns:a="http://schemas.openxmlformats.org/drawingml/2006/main" xmlns:r="http://schemas.openxmlformats.org/officeDocument/2006/relationships" xmlns:p="http://schemas.openxmlformats.org/presentationml/2006/main">
+  <p:cSld>
+    <p:spTree>
+      <p:nvGrpSpPr>
         <p:cNvPr id="1" name=""/>
         <p:cNvGrpSpPr/>
         <p:nvPr/>
@@ -5562,7 +5933,7 @@
 </p:sld>
 </file>
 
-<file path=ppt/slides/slide21.xml><?xml version="1.0" encoding="utf-8"?>
+<file path=ppt/slides/slide23.xml><?xml version="1.0" encoding="utf-8"?>
 <p:sld xmlns:a="http://schemas.openxmlformats.org/drawingml/2006/main" xmlns:r="http://schemas.openxmlformats.org/officeDocument/2006/relationships" xmlns:p="http://schemas.openxmlformats.org/presentationml/2006/main">
   <p:cSld>
     <p:spTree>
@@ -5710,7 +6081,7 @@
 </p:sld>
 </file>
 
-<file path=ppt/slides/slide22.xml><?xml version="1.0" encoding="utf-8"?>
+<file path=ppt/slides/slide24.xml><?xml version="1.0" encoding="utf-8"?>
 <p:sld xmlns:a="http://schemas.openxmlformats.org/drawingml/2006/main" xmlns:r="http://schemas.openxmlformats.org/officeDocument/2006/relationships" xmlns:p="http://schemas.openxmlformats.org/presentationml/2006/main">
   <p:cSld>
     <p:spTree>
@@ -5942,7 +6313,7 @@
 </p:sld>
 </file>
 
-<file path=ppt/slides/slide23.xml><?xml version="1.0" encoding="utf-8"?>
+<file path=ppt/slides/slide25.xml><?xml version="1.0" encoding="utf-8"?>
 <p:sld xmlns:a="http://schemas.openxmlformats.org/drawingml/2006/main" xmlns:r="http://schemas.openxmlformats.org/officeDocument/2006/relationships" xmlns:p="http://schemas.openxmlformats.org/presentationml/2006/main">
   <p:cSld>
     <p:spTree>
@@ -6897,6 +7268,17 @@
           <a:p>
             <a:r>
               <a:rPr lang="en-US" sz="1800" dirty="0">
+                <a:effectLst/>
+                <a:latin typeface="Aptos" panose="020B0004020202020204" pitchFamily="34" charset="0"/>
+                <a:ea typeface="Aptos" panose="020B0004020202020204" pitchFamily="34" charset="0"/>
+                <a:cs typeface="Times New Roman" panose="02020603050405020304" pitchFamily="18" charset="0"/>
+              </a:rPr>
+              <a:t>Use in full stack applications.</a:t>
+            </a:r>
+          </a:p>
+          <a:p>
+            <a:r>
+              <a:rPr lang="en-US" sz="1800" dirty="0">
                 <a:latin typeface="Aptos" panose="020B0004020202020204" pitchFamily="34" charset="0"/>
                 <a:cs typeface="Times New Roman" panose="02020603050405020304" pitchFamily="18" charset="0"/>
               </a:rPr>
@@ -6958,6 +7340,96 @@
           <p:cNvPr id="2" name="Title 1">
             <a:extLst>
               <a:ext uri="{FF2B5EF4-FFF2-40B4-BE49-F238E27FC236}">
+                <a16:creationId xmlns:a16="http://schemas.microsoft.com/office/drawing/2014/main" id="{A035A7CD-486D-9AD2-0342-0A4BC8C7BDE6}"/>
+              </a:ext>
+            </a:extLst>
+          </p:cNvPr>
+          <p:cNvSpPr>
+            <a:spLocks noGrp="1"/>
+          </p:cNvSpPr>
+          <p:nvPr>
+            <p:ph type="title"/>
+          </p:nvPr>
+        </p:nvSpPr>
+        <p:spPr/>
+        <p:txBody>
+          <a:bodyPr/>
+          <a:lstStyle/>
+          <a:p>
+            <a:r>
+              <a:rPr lang="en-US" dirty="0"/>
+              <a:t>Full Stack Applications:</a:t>
+            </a:r>
+          </a:p>
+        </p:txBody>
+      </p:sp>
+      <p:pic>
+        <p:nvPicPr>
+          <p:cNvPr id="5" name="Content Placeholder 4">
+            <a:extLst>
+              <a:ext uri="{FF2B5EF4-FFF2-40B4-BE49-F238E27FC236}">
+                <a16:creationId xmlns:a16="http://schemas.microsoft.com/office/drawing/2014/main" id="{65B68917-AA3F-3839-C1A3-AB9BEE7D6228}"/>
+              </a:ext>
+            </a:extLst>
+          </p:cNvPr>
+          <p:cNvPicPr>
+            <a:picLocks noGrp="1" noChangeAspect="1"/>
+          </p:cNvPicPr>
+          <p:nvPr>
+            <p:ph idx="1"/>
+          </p:nvPr>
+        </p:nvPicPr>
+        <p:blipFill>
+          <a:blip r:embed="rId2"/>
+          <a:stretch>
+            <a:fillRect/>
+          </a:stretch>
+        </p:blipFill>
+        <p:spPr>
+          <a:xfrm>
+            <a:off x="1173707" y="1298551"/>
+            <a:ext cx="8258032" cy="5194324"/>
+          </a:xfrm>
+          <a:prstGeom prst="rect">
+            <a:avLst/>
+          </a:prstGeom>
+        </p:spPr>
+      </p:pic>
+    </p:spTree>
+    <p:extLst>
+      <p:ext uri="{BB962C8B-B14F-4D97-AF65-F5344CB8AC3E}">
+        <p14:creationId xmlns:p14="http://schemas.microsoft.com/office/powerpoint/2010/main" val="174761930"/>
+      </p:ext>
+    </p:extLst>
+  </p:cSld>
+  <p:clrMapOvr>
+    <a:masterClrMapping/>
+  </p:clrMapOvr>
+</p:sld>
+</file>
+
+<file path=ppt/slides/slide6.xml><?xml version="1.0" encoding="utf-8"?>
+<p:sld xmlns:a="http://schemas.openxmlformats.org/drawingml/2006/main" xmlns:r="http://schemas.openxmlformats.org/officeDocument/2006/relationships" xmlns:p="http://schemas.openxmlformats.org/presentationml/2006/main">
+  <p:cSld>
+    <p:spTree>
+      <p:nvGrpSpPr>
+        <p:cNvPr id="1" name=""/>
+        <p:cNvGrpSpPr/>
+        <p:nvPr/>
+      </p:nvGrpSpPr>
+      <p:grpSpPr>
+        <a:xfrm>
+          <a:off x="0" y="0"/>
+          <a:ext cx="0" cy="0"/>
+          <a:chOff x="0" y="0"/>
+          <a:chExt cx="0" cy="0"/>
+        </a:xfrm>
+      </p:grpSpPr>
+      <p:sp>
+        <p:nvSpPr>
+          <p:cNvPr id="2" name="Title 1">
+            <a:extLst>
+              <a:ext uri="{FF2B5EF4-FFF2-40B4-BE49-F238E27FC236}">
                 <a16:creationId xmlns:a16="http://schemas.microsoft.com/office/drawing/2014/main" id="{7D0C65F5-0DDE-CCE0-DD2E-436574AF6267}"/>
               </a:ext>
             </a:extLst>
@@ -7289,7 +7761,7 @@
 </p:sld>
 </file>
 
-<file path=ppt/slides/slide6.xml><?xml version="1.0" encoding="utf-8"?>
+<file path=ppt/slides/slide7.xml><?xml version="1.0" encoding="utf-8"?>
 <p:sld xmlns:a="http://schemas.openxmlformats.org/drawingml/2006/main" xmlns:r="http://schemas.openxmlformats.org/officeDocument/2006/relationships" xmlns:p="http://schemas.openxmlformats.org/presentationml/2006/main">
   <p:cSld>
     <p:spTree>
@@ -7444,7 +7916,7 @@
 </p:sld>
 </file>
 
-<file path=ppt/slides/slide7.xml><?xml version="1.0" encoding="utf-8"?>
+<file path=ppt/slides/slide8.xml><?xml version="1.0" encoding="utf-8"?>
 <p:sld xmlns:a="http://schemas.openxmlformats.org/drawingml/2006/main" xmlns:r="http://schemas.openxmlformats.org/officeDocument/2006/relationships" xmlns:p="http://schemas.openxmlformats.org/presentationml/2006/main">
   <p:cSld>
     <p:spTree>
@@ -7621,7 +8093,7 @@
 </p:sld>
 </file>
 
-<file path=ppt/slides/slide8.xml><?xml version="1.0" encoding="utf-8"?>
+<file path=ppt/slides/slide9.xml><?xml version="1.0" encoding="utf-8"?>
 <p:sld xmlns:a="http://schemas.openxmlformats.org/drawingml/2006/main" xmlns:r="http://schemas.openxmlformats.org/officeDocument/2006/relationships" xmlns:p="http://schemas.openxmlformats.org/presentationml/2006/main">
   <p:cSld>
     <p:spTree>
@@ -7824,220 +8296,6 @@
     <p:extLst>
       <p:ext uri="{BB962C8B-B14F-4D97-AF65-F5344CB8AC3E}">
         <p14:creationId xmlns:p14="http://schemas.microsoft.com/office/powerpoint/2010/main" val="3716680381"/>
-      </p:ext>
-    </p:extLst>
-  </p:cSld>
-  <p:clrMapOvr>
-    <a:masterClrMapping/>
-  </p:clrMapOvr>
-</p:sld>
-</file>
-
-<file path=ppt/slides/slide9.xml><?xml version="1.0" encoding="utf-8"?>
-<p:sld xmlns:a="http://schemas.openxmlformats.org/drawingml/2006/main" xmlns:r="http://schemas.openxmlformats.org/officeDocument/2006/relationships" xmlns:p="http://schemas.openxmlformats.org/presentationml/2006/main">
-  <p:cSld>
-    <p:spTree>
-      <p:nvGrpSpPr>
-        <p:cNvPr id="1" name=""/>
-        <p:cNvGrpSpPr/>
-        <p:nvPr/>
-      </p:nvGrpSpPr>
-      <p:grpSpPr>
-        <a:xfrm>
-          <a:off x="0" y="0"/>
-          <a:ext cx="0" cy="0"/>
-          <a:chOff x="0" y="0"/>
-          <a:chExt cx="0" cy="0"/>
-        </a:xfrm>
-      </p:grpSpPr>
-      <p:sp>
-        <p:nvSpPr>
-          <p:cNvPr id="2" name="Title 1">
-            <a:extLst>
-              <a:ext uri="{FF2B5EF4-FFF2-40B4-BE49-F238E27FC236}">
-                <a16:creationId xmlns:a16="http://schemas.microsoft.com/office/drawing/2014/main" id="{5A79FD0C-1C00-93F0-A57B-569DC7E4282C}"/>
-              </a:ext>
-            </a:extLst>
-          </p:cNvPr>
-          <p:cNvSpPr>
-            <a:spLocks noGrp="1"/>
-          </p:cNvSpPr>
-          <p:nvPr>
-            <p:ph type="title"/>
-          </p:nvPr>
-        </p:nvSpPr>
-        <p:spPr/>
-        <p:txBody>
-          <a:bodyPr/>
-          <a:lstStyle/>
-          <a:p>
-            <a:r>
-              <a:rPr lang="en-US" sz="4400" kern="100" dirty="0">
-                <a:effectLst/>
-                <a:latin typeface="Aptos" panose="020B0004020202020204" pitchFamily="34" charset="0"/>
-                <a:ea typeface="Aptos" panose="020B0004020202020204" pitchFamily="34" charset="0"/>
-                <a:cs typeface="Times New Roman" panose="02020603050405020304" pitchFamily="18" charset="0"/>
-              </a:rPr>
-              <a:t>Compound where clause (AND)</a:t>
-            </a:r>
-            <a:endParaRPr lang="en-US" dirty="0"/>
-          </a:p>
-        </p:txBody>
-      </p:sp>
-      <p:sp>
-        <p:nvSpPr>
-          <p:cNvPr id="3" name="Content Placeholder 2">
-            <a:extLst>
-              <a:ext uri="{FF2B5EF4-FFF2-40B4-BE49-F238E27FC236}">
-                <a16:creationId xmlns:a16="http://schemas.microsoft.com/office/drawing/2014/main" id="{20E3E195-E716-9566-F681-3F630822ED2E}"/>
-              </a:ext>
-            </a:extLst>
-          </p:cNvPr>
-          <p:cNvSpPr>
-            <a:spLocks noGrp="1"/>
-          </p:cNvSpPr>
-          <p:nvPr>
-            <p:ph idx="1"/>
-          </p:nvPr>
-        </p:nvSpPr>
-        <p:spPr/>
-        <p:txBody>
-          <a:bodyPr>
-            <a:normAutofit/>
-          </a:bodyPr>
-          <a:lstStyle/>
-          <a:p>
-            <a:pPr marL="0" marR="0" indent="0">
-              <a:spcBef>
-                <a:spcPts val="0"/>
-              </a:spcBef>
-              <a:spcAft>
-                <a:spcPts val="0"/>
-              </a:spcAft>
-              <a:buNone/>
-            </a:pPr>
-            <a:r>
-              <a:rPr lang="en-US" sz="2400" kern="100" dirty="0">
-                <a:effectLst/>
-                <a:latin typeface="Aptos" panose="020B0004020202020204" pitchFamily="34" charset="0"/>
-                <a:ea typeface="Aptos" panose="020B0004020202020204" pitchFamily="34" charset="0"/>
-                <a:cs typeface="Times New Roman" panose="02020603050405020304" pitchFamily="18" charset="0"/>
-              </a:rPr>
-              <a:t>SELECT *</a:t>
-            </a:r>
-          </a:p>
-          <a:p>
-            <a:pPr marL="0" marR="0" indent="0">
-              <a:spcBef>
-                <a:spcPts val="0"/>
-              </a:spcBef>
-              <a:spcAft>
-                <a:spcPts val="0"/>
-              </a:spcAft>
-              <a:buNone/>
-            </a:pPr>
-            <a:r>
-              <a:rPr lang="en-US" sz="2400" kern="100" dirty="0">
-                <a:effectLst/>
-                <a:latin typeface="Aptos" panose="020B0004020202020204" pitchFamily="34" charset="0"/>
-                <a:ea typeface="Aptos" panose="020B0004020202020204" pitchFamily="34" charset="0"/>
-                <a:cs typeface="Times New Roman" panose="02020603050405020304" pitchFamily="18" charset="0"/>
-              </a:rPr>
-              <a:t>FROM table</a:t>
-            </a:r>
-          </a:p>
-          <a:p>
-            <a:pPr marL="0" marR="0" indent="0">
-              <a:spcBef>
-                <a:spcPts val="0"/>
-              </a:spcBef>
-              <a:spcAft>
-                <a:spcPts val="0"/>
-              </a:spcAft>
-              <a:buNone/>
-            </a:pPr>
-            <a:r>
-              <a:rPr lang="en-US" sz="2400" kern="100" dirty="0">
-                <a:effectLst/>
-                <a:latin typeface="Aptos" panose="020B0004020202020204" pitchFamily="34" charset="0"/>
-                <a:ea typeface="Aptos" panose="020B0004020202020204" pitchFamily="34" charset="0"/>
-                <a:cs typeface="Times New Roman" panose="02020603050405020304" pitchFamily="18" charset="0"/>
-              </a:rPr>
-              <a:t>WHERE column1 = ? AND column2 = ? – Compound where clause</a:t>
-            </a:r>
-          </a:p>
-          <a:p>
-            <a:pPr marL="0" indent="0">
-              <a:buNone/>
-            </a:pPr>
-            <a:endParaRPr lang="en-US" sz="2400" dirty="0"/>
-          </a:p>
-          <a:p>
-            <a:pPr marL="0" indent="0">
-              <a:buNone/>
-            </a:pPr>
-            <a:r>
-              <a:rPr lang="en-US" sz="2400" dirty="0"/>
-              <a:t>SELECT * FROM items</a:t>
-            </a:r>
-          </a:p>
-          <a:p>
-            <a:pPr marL="0" indent="0">
-              <a:buNone/>
-            </a:pPr>
-            <a:r>
-              <a:rPr lang="en-US" sz="2400" dirty="0"/>
-              <a:t>WHERE price &gt; 500 AND quantity&gt;90;</a:t>
-            </a:r>
-          </a:p>
-          <a:p>
-            <a:pPr marL="0" indent="0">
-              <a:buNone/>
-            </a:pPr>
-            <a:endParaRPr lang="en-US" sz="2400" dirty="0"/>
-          </a:p>
-          <a:p>
-            <a:pPr marL="0" indent="0">
-              <a:buNone/>
-            </a:pPr>
-            <a:endParaRPr lang="en-US" sz="2400" dirty="0"/>
-          </a:p>
-        </p:txBody>
-      </p:sp>
-      <p:pic>
-        <p:nvPicPr>
-          <p:cNvPr id="5" name="Picture 4" descr="A screenshot of a computer&#10;&#10;Description automatically generated">
-            <a:extLst>
-              <a:ext uri="{FF2B5EF4-FFF2-40B4-BE49-F238E27FC236}">
-                <a16:creationId xmlns:a16="http://schemas.microsoft.com/office/drawing/2014/main" id="{8FB6CC87-374C-50F6-F28F-8BC2F6F16768}"/>
-              </a:ext>
-            </a:extLst>
-          </p:cNvPr>
-          <p:cNvPicPr>
-            <a:picLocks noChangeAspect="1"/>
-          </p:cNvPicPr>
-          <p:nvPr/>
-        </p:nvPicPr>
-        <p:blipFill>
-          <a:blip r:embed="rId2"/>
-          <a:stretch>
-            <a:fillRect/>
-          </a:stretch>
-        </p:blipFill>
-        <p:spPr>
-          <a:xfrm>
-            <a:off x="887955" y="4589309"/>
-            <a:ext cx="4549483" cy="1310449"/>
-          </a:xfrm>
-          <a:prstGeom prst="rect">
-            <a:avLst/>
-          </a:prstGeom>
-        </p:spPr>
-      </p:pic>
-    </p:spTree>
-    <p:extLst>
-      <p:ext uri="{BB962C8B-B14F-4D97-AF65-F5344CB8AC3E}">
-        <p14:creationId xmlns:p14="http://schemas.microsoft.com/office/powerpoint/2010/main" val="3748167887"/>
       </p:ext>
     </p:extLst>
   </p:cSld>
